--- a/fig_polished/fig_6_brain_behavior_correlation.pptx
+++ b/fig_polished/fig_6_brain_behavior_correlation.pptx
@@ -197,7 +197,7 @@
           <a:p>
             <a:fld id="{6E3734C7-62C3-6645-81B6-9D52AAA4DAF4}" type="datetimeFigureOut">
               <a:rPr lang="en-US" smtClean="0"/>
-              <a:t>4/13/26</a:t>
+              <a:t>4/28/26</a:t>
             </a:fld>
             <a:endParaRPr lang="en-US"/>
           </a:p>
@@ -708,7 +708,7 @@
           <a:p>
             <a:fld id="{E559E9A2-8A25-3F40-91C0-3E603CEBBE92}" type="datetimeFigureOut">
               <a:rPr lang="en-US" smtClean="0"/>
-              <a:t>4/13/26</a:t>
+              <a:t>4/28/26</a:t>
             </a:fld>
             <a:endParaRPr lang="en-US"/>
           </a:p>
@@ -878,7 +878,7 @@
           <a:p>
             <a:fld id="{E559E9A2-8A25-3F40-91C0-3E603CEBBE92}" type="datetimeFigureOut">
               <a:rPr lang="en-US" smtClean="0"/>
-              <a:t>4/13/26</a:t>
+              <a:t>4/28/26</a:t>
             </a:fld>
             <a:endParaRPr lang="en-US"/>
           </a:p>
@@ -1058,7 +1058,7 @@
           <a:p>
             <a:fld id="{E559E9A2-8A25-3F40-91C0-3E603CEBBE92}" type="datetimeFigureOut">
               <a:rPr lang="en-US" smtClean="0"/>
-              <a:t>4/13/26</a:t>
+              <a:t>4/28/26</a:t>
             </a:fld>
             <a:endParaRPr lang="en-US"/>
           </a:p>
@@ -1228,7 +1228,7 @@
           <a:p>
             <a:fld id="{E559E9A2-8A25-3F40-91C0-3E603CEBBE92}" type="datetimeFigureOut">
               <a:rPr lang="en-US" smtClean="0"/>
-              <a:t>4/13/26</a:t>
+              <a:t>4/28/26</a:t>
             </a:fld>
             <a:endParaRPr lang="en-US"/>
           </a:p>
@@ -1474,7 +1474,7 @@
           <a:p>
             <a:fld id="{E559E9A2-8A25-3F40-91C0-3E603CEBBE92}" type="datetimeFigureOut">
               <a:rPr lang="en-US" smtClean="0"/>
-              <a:t>4/13/26</a:t>
+              <a:t>4/28/26</a:t>
             </a:fld>
             <a:endParaRPr lang="en-US"/>
           </a:p>
@@ -1706,7 +1706,7 @@
           <a:p>
             <a:fld id="{E559E9A2-8A25-3F40-91C0-3E603CEBBE92}" type="datetimeFigureOut">
               <a:rPr lang="en-US" smtClean="0"/>
-              <a:t>4/13/26</a:t>
+              <a:t>4/28/26</a:t>
             </a:fld>
             <a:endParaRPr lang="en-US"/>
           </a:p>
@@ -2073,7 +2073,7 @@
           <a:p>
             <a:fld id="{E559E9A2-8A25-3F40-91C0-3E603CEBBE92}" type="datetimeFigureOut">
               <a:rPr lang="en-US" smtClean="0"/>
-              <a:t>4/13/26</a:t>
+              <a:t>4/28/26</a:t>
             </a:fld>
             <a:endParaRPr lang="en-US"/>
           </a:p>
@@ -2191,7 +2191,7 @@
           <a:p>
             <a:fld id="{E559E9A2-8A25-3F40-91C0-3E603CEBBE92}" type="datetimeFigureOut">
               <a:rPr lang="en-US" smtClean="0"/>
-              <a:t>4/13/26</a:t>
+              <a:t>4/28/26</a:t>
             </a:fld>
             <a:endParaRPr lang="en-US"/>
           </a:p>
@@ -2286,7 +2286,7 @@
           <a:p>
             <a:fld id="{E559E9A2-8A25-3F40-91C0-3E603CEBBE92}" type="datetimeFigureOut">
               <a:rPr lang="en-US" smtClean="0"/>
-              <a:t>4/13/26</a:t>
+              <a:t>4/28/26</a:t>
             </a:fld>
             <a:endParaRPr lang="en-US"/>
           </a:p>
@@ -2563,7 +2563,7 @@
           <a:p>
             <a:fld id="{E559E9A2-8A25-3F40-91C0-3E603CEBBE92}" type="datetimeFigureOut">
               <a:rPr lang="en-US" smtClean="0"/>
-              <a:t>4/13/26</a:t>
+              <a:t>4/28/26</a:t>
             </a:fld>
             <a:endParaRPr lang="en-US"/>
           </a:p>
@@ -2820,7 +2820,7 @@
           <a:p>
             <a:fld id="{E559E9A2-8A25-3F40-91C0-3E603CEBBE92}" type="datetimeFigureOut">
               <a:rPr lang="en-US" smtClean="0"/>
-              <a:t>4/13/26</a:t>
+              <a:t>4/28/26</a:t>
             </a:fld>
             <a:endParaRPr lang="en-US"/>
           </a:p>
@@ -3033,7 +3033,7 @@
           <a:p>
             <a:fld id="{E559E9A2-8A25-3F40-91C0-3E603CEBBE92}" type="datetimeFigureOut">
               <a:rPr lang="en-US" smtClean="0"/>
-              <a:t>4/13/26</a:t>
+              <a:t>4/28/26</a:t>
             </a:fld>
             <a:endParaRPr lang="en-US"/>
           </a:p>
@@ -3489,8 +3489,8 @@
         </p:nvSpPr>
         <p:spPr>
           <a:xfrm>
-            <a:off x="98699" y="89210"/>
-            <a:ext cx="312906" cy="276999"/>
+            <a:off x="1301704" y="89211"/>
+            <a:ext cx="1766830" cy="461665"/>
           </a:xfrm>
           <a:prstGeom prst="rect">
             <a:avLst/>
@@ -3503,11 +3503,23 @@
           </a:bodyPr>
           <a:lstStyle/>
           <a:p>
+            <a:pPr algn="ctr"/>
             <a:r>
               <a:rPr lang="en-US" sz="1200" b="1" dirty="0">
                 <a:latin typeface="Helvetica" pitchFamily="2" charset="0"/>
               </a:rPr>
-              <a:t>a.</a:t>
+              <a:t>a. Conscientiousness</a:t>
+            </a:r>
+            <a:br>
+              <a:rPr lang="en-US" sz="1200" b="1" dirty="0">
+                <a:latin typeface="Helvetica" pitchFamily="2" charset="0"/>
+              </a:rPr>
+            </a:br>
+            <a:r>
+              <a:rPr lang="en-US" sz="1200" b="1" dirty="0">
+                <a:latin typeface="Helvetica" pitchFamily="2" charset="0"/>
+              </a:rPr>
+              <a:t>Total Cohort</a:t>
             </a:r>
           </a:p>
         </p:txBody>
@@ -3526,8 +3538,8 @@
         </p:nvSpPr>
         <p:spPr>
           <a:xfrm>
-            <a:off x="3705817" y="89211"/>
-            <a:ext cx="322524" cy="276999"/>
+            <a:off x="4293038" y="89211"/>
+            <a:ext cx="1959191" cy="461665"/>
           </a:xfrm>
           <a:prstGeom prst="rect">
             <a:avLst/>
@@ -3540,11 +3552,23 @@
           </a:bodyPr>
           <a:lstStyle/>
           <a:p>
+            <a:pPr algn="ctr"/>
             <a:r>
               <a:rPr lang="en-US" sz="1200" b="1" dirty="0">
                 <a:latin typeface="Helvetica" pitchFamily="2" charset="0"/>
               </a:rPr>
-              <a:t>b.</a:t>
+              <a:t>b. Internalizing Behavior</a:t>
+            </a:r>
+            <a:br>
+              <a:rPr lang="en-US" sz="1200" b="1" dirty="0">
+                <a:latin typeface="Helvetica" pitchFamily="2" charset="0"/>
+              </a:rPr>
+            </a:br>
+            <a:r>
+              <a:rPr lang="en-US" sz="1200" b="1" dirty="0">
+                <a:latin typeface="Helvetica" pitchFamily="2" charset="0"/>
+              </a:rPr>
+              <a:t>Total Cohort</a:t>
             </a:r>
           </a:p>
         </p:txBody>
@@ -3563,8 +3587,8 @@
         </p:nvSpPr>
         <p:spPr>
           <a:xfrm>
-            <a:off x="7306766" y="89211"/>
-            <a:ext cx="312906" cy="276999"/>
+            <a:off x="7872036" y="89211"/>
+            <a:ext cx="2015295" cy="461665"/>
           </a:xfrm>
           <a:prstGeom prst="rect">
             <a:avLst/>
@@ -3577,11 +3601,23 @@
           </a:bodyPr>
           <a:lstStyle/>
           <a:p>
+            <a:pPr algn="ctr"/>
             <a:r>
               <a:rPr lang="en-US" sz="1200" b="1" dirty="0">
                 <a:latin typeface="Helvetica" pitchFamily="2" charset="0"/>
               </a:rPr>
-              <a:t>c.</a:t>
+              <a:t>c. Externalizing Behavior</a:t>
+            </a:r>
+            <a:br>
+              <a:rPr lang="en-US" sz="1200" b="1" dirty="0">
+                <a:latin typeface="Helvetica" pitchFamily="2" charset="0"/>
+              </a:rPr>
+            </a:br>
+            <a:r>
+              <a:rPr lang="en-US" sz="1200" b="1" dirty="0">
+                <a:latin typeface="Helvetica" pitchFamily="2" charset="0"/>
+              </a:rPr>
+              <a:t>Total Cohort</a:t>
             </a:r>
           </a:p>
         </p:txBody>
@@ -3600,8 +3636,8 @@
         </p:nvSpPr>
         <p:spPr>
           <a:xfrm>
-            <a:off x="1184698" y="3634179"/>
-            <a:ext cx="2614818" cy="276999"/>
+            <a:off x="1687750" y="3634179"/>
+            <a:ext cx="1526380" cy="276999"/>
           </a:xfrm>
           <a:prstGeom prst="rect">
             <a:avLst/>
@@ -3614,11 +3650,12 @@
           </a:bodyPr>
           <a:lstStyle/>
           <a:p>
+            <a:pPr algn="ctr"/>
             <a:r>
               <a:rPr lang="en-US" sz="1200" b="1" dirty="0">
                 <a:latin typeface="Helvetica" pitchFamily="2" charset="0"/>
               </a:rPr>
-              <a:t>d.	        	        </a:t>
+              <a:t>d. </a:t>
             </a:r>
             <a:r>
               <a:rPr lang="en-US" sz="1000" b="1" dirty="0">
@@ -3643,7 +3680,7 @@
         </p:nvSpPr>
         <p:spPr>
           <a:xfrm>
-            <a:off x="4463449" y="3634179"/>
+            <a:off x="5452969" y="3634179"/>
             <a:ext cx="2828612" cy="276999"/>
           </a:xfrm>
           <a:prstGeom prst="rect">
@@ -3657,11 +3694,12 @@
           </a:bodyPr>
           <a:lstStyle/>
           <a:p>
+            <a:pPr algn="ctr"/>
             <a:r>
               <a:rPr lang="en-US" sz="1200" b="1" dirty="0">
                 <a:latin typeface="Helvetica" pitchFamily="2" charset="0"/>
               </a:rPr>
-              <a:t>e.	                         	</a:t>
+              <a:t>e. </a:t>
             </a:r>
             <a:r>
               <a:rPr lang="en-US" sz="1000" b="1" dirty="0">
@@ -3723,8 +3761,8 @@
         </p:nvSpPr>
         <p:spPr>
           <a:xfrm>
-            <a:off x="8881086" y="5159728"/>
-            <a:ext cx="1634514" cy="1169551"/>
+            <a:off x="8853636" y="5159728"/>
+            <a:ext cx="1704492" cy="1323439"/>
           </a:xfrm>
           <a:prstGeom prst="rect">
             <a:avLst/>
@@ -3741,7 +3779,31 @@
               <a:rPr lang="en-US" sz="1000" dirty="0">
                 <a:latin typeface="Helvetica" pitchFamily="2" charset="0"/>
               </a:rPr>
-              <a:t>Significance (raw)</a:t>
+              <a:t>No covariate control</a:t>
+            </a:r>
+          </a:p>
+          <a:p>
+            <a:r>
+              <a:rPr lang="en-US" sz="1000" dirty="0">
+                <a:latin typeface="Helvetica" pitchFamily="2" charset="0"/>
+              </a:rPr>
+              <a:t>Demographics controlled</a:t>
+            </a:r>
+          </a:p>
+          <a:p>
+            <a:r>
+              <a:rPr lang="en-US" sz="1000" dirty="0">
+                <a:latin typeface="Helvetica" pitchFamily="2" charset="0"/>
+              </a:rPr>
+              <a:t>Mean head motion controlled</a:t>
+            </a:r>
+          </a:p>
+          <a:p>
+            <a:r>
+              <a:rPr lang="en-US" sz="1000" dirty="0">
+                <a:latin typeface="Helvetica" pitchFamily="2" charset="0"/>
+              </a:rPr>
+              <a:t>Significance (uncorrected)</a:t>
             </a:r>
           </a:p>
           <a:p>
@@ -3753,28 +3815,9 @@
             </a:r>
           </a:p>
           <a:p>
-            <a:r>
-              <a:rPr lang="en-US" sz="1000" dirty="0">
-                <a:latin typeface="Helvetica" pitchFamily="2" charset="0"/>
-              </a:rPr>
-              <a:t>No covariate control</a:t>
-            </a:r>
-          </a:p>
-          <a:p>
-            <a:r>
-              <a:rPr lang="en-US" sz="1000" dirty="0">
-                <a:latin typeface="Helvetica" pitchFamily="2" charset="0"/>
-              </a:rPr>
-              <a:t>Demographics controlled</a:t>
-            </a:r>
-          </a:p>
-          <a:p>
-            <a:r>
-              <a:rPr lang="en-US" sz="1000" dirty="0">
-                <a:latin typeface="Helvetica" pitchFamily="2" charset="0"/>
-              </a:rPr>
-              <a:t>Mean head motion controlled</a:t>
-            </a:r>
+            <a:endParaRPr lang="en-US" sz="1000" dirty="0">
+              <a:latin typeface="Helvetica" pitchFamily="2" charset="0"/>
+            </a:endParaRPr>
           </a:p>
         </p:txBody>
       </p:sp>
@@ -3792,7 +3835,7 @@
         </p:nvGrpSpPr>
         <p:grpSpPr>
           <a:xfrm>
-            <a:off x="8811108" y="5708540"/>
+            <a:off x="8811108" y="5261152"/>
             <a:ext cx="69978" cy="369039"/>
             <a:chOff x="8968742" y="3811927"/>
             <a:chExt cx="69978" cy="369039"/>
@@ -4360,7 +4403,7 @@
         </p:nvSpPr>
         <p:spPr>
           <a:xfrm>
-            <a:off x="8716998" y="5315285"/>
+            <a:off x="8716998" y="5918067"/>
             <a:ext cx="232442" cy="369332"/>
           </a:xfrm>
           <a:prstGeom prst="rect">
@@ -4397,7 +4440,7 @@
         </p:nvSpPr>
         <p:spPr>
           <a:xfrm>
-            <a:off x="8726149" y="5144160"/>
+            <a:off x="8726149" y="5769518"/>
             <a:ext cx="232442" cy="246221"/>
           </a:xfrm>
           <a:prstGeom prst="rect">
@@ -4827,6 +4870,622 @@
           </a:p>
         </p:txBody>
       </p:sp>
+      <p:graphicFrame>
+        <p:nvGraphicFramePr>
+          <p:cNvPr id="4" name="Table 3">
+            <a:extLst>
+              <a:ext uri="{FF2B5EF4-FFF2-40B4-BE49-F238E27FC236}">
+                <a16:creationId xmlns:a16="http://schemas.microsoft.com/office/drawing/2014/main" id="{39E93001-E4C2-38A8-8AD6-5BFACCE8B711}"/>
+              </a:ext>
+            </a:extLst>
+          </p:cNvPr>
+          <p:cNvGraphicFramePr>
+            <a:graphicFrameLocks noGrp="1"/>
+          </p:cNvGraphicFramePr>
+          <p:nvPr>
+            <p:extLst>
+              <p:ext uri="{D42A27DB-BD31-4B8C-83A1-F6EECF244321}">
+                <p14:modId xmlns:p14="http://schemas.microsoft.com/office/powerpoint/2010/main" val="470340048"/>
+              </p:ext>
+            </p:extLst>
+          </p:nvPr>
+        </p:nvGraphicFramePr>
+        <p:xfrm>
+          <a:off x="8664462" y="6334234"/>
+          <a:ext cx="1851138" cy="602672"/>
+        </p:xfrm>
+        <a:graphic>
+          <a:graphicData uri="http://schemas.openxmlformats.org/drawingml/2006/table">
+            <a:tbl>
+              <a:tblPr firstRow="1" bandRow="1">
+                <a:tableStyleId>{5C22544A-7EE6-4342-B048-85BDC9FD1C3A}</a:tableStyleId>
+              </a:tblPr>
+              <a:tblGrid>
+                <a:gridCol w="702720">
+                  <a:extLst>
+                    <a:ext uri="{9D8B030D-6E8A-4147-A177-3AD203B41FA5}">
+                      <a16:colId xmlns:a16="http://schemas.microsoft.com/office/drawing/2014/main" val="1213894982"/>
+                    </a:ext>
+                  </a:extLst>
+                </a:gridCol>
+                <a:gridCol w="372694">
+                  <a:extLst>
+                    <a:ext uri="{9D8B030D-6E8A-4147-A177-3AD203B41FA5}">
+                      <a16:colId xmlns:a16="http://schemas.microsoft.com/office/drawing/2014/main" val="3208104658"/>
+                    </a:ext>
+                  </a:extLst>
+                </a:gridCol>
+                <a:gridCol w="342359">
+                  <a:extLst>
+                    <a:ext uri="{9D8B030D-6E8A-4147-A177-3AD203B41FA5}">
+                      <a16:colId xmlns:a16="http://schemas.microsoft.com/office/drawing/2014/main" val="8878848"/>
+                    </a:ext>
+                  </a:extLst>
+                </a:gridCol>
+                <a:gridCol w="433365">
+                  <a:extLst>
+                    <a:ext uri="{9D8B030D-6E8A-4147-A177-3AD203B41FA5}">
+                      <a16:colId xmlns:a16="http://schemas.microsoft.com/office/drawing/2014/main" val="4254216446"/>
+                    </a:ext>
+                  </a:extLst>
+                </a:gridCol>
+              </a:tblGrid>
+              <a:tr h="171173">
+                <a:tc>
+                  <a:txBody>
+                    <a:bodyPr/>
+                    <a:lstStyle/>
+                    <a:p>
+                      <a:pPr algn="ctr"/>
+                      <a:r>
+                        <a:rPr lang="en-US" sz="1000" b="0" dirty="0">
+                          <a:solidFill>
+                            <a:schemeClr val="tx1"/>
+                          </a:solidFill>
+                        </a:rPr>
+                        <a:t>p-value</a:t>
+                      </a:r>
+                    </a:p>
+                  </a:txBody>
+                  <a:tcPr marL="9144" marR="9144" marT="9144" marB="9144">
+                    <a:lnL w="12700" cmpd="sng">
+                      <a:noFill/>
+                    </a:lnL>
+                    <a:lnR w="12700" cmpd="sng">
+                      <a:noFill/>
+                    </a:lnR>
+                    <a:lnT w="12700" cmpd="sng">
+                      <a:noFill/>
+                    </a:lnT>
+                    <a:lnB w="38100" cmpd="sng">
+                      <a:noFill/>
+                    </a:lnB>
+                    <a:lnTlToBr w="12700" cmpd="sng">
+                      <a:noFill/>
+                      <a:prstDash val="solid"/>
+                    </a:lnTlToBr>
+                    <a:lnBlToTr w="12700" cmpd="sng">
+                      <a:noFill/>
+                      <a:prstDash val="solid"/>
+                    </a:lnBlToTr>
+                    <a:noFill/>
+                  </a:tcPr>
+                </a:tc>
+                <a:tc>
+                  <a:txBody>
+                    <a:bodyPr/>
+                    <a:lstStyle/>
+                    <a:p>
+                      <a:pPr algn="ctr"/>
+                      <a:r>
+                        <a:rPr lang="en-US" sz="1000" b="0" dirty="0">
+                          <a:solidFill>
+                            <a:schemeClr val="tx1"/>
+                          </a:solidFill>
+                        </a:rPr>
+                        <a:t>&lt; 0.05</a:t>
+                      </a:r>
+                    </a:p>
+                  </a:txBody>
+                  <a:tcPr marL="9144" marR="9144" marT="9144" marB="9144">
+                    <a:lnL w="12700" cmpd="sng">
+                      <a:noFill/>
+                    </a:lnL>
+                    <a:lnR w="12700" cmpd="sng">
+                      <a:noFill/>
+                    </a:lnR>
+                    <a:lnT w="12700" cmpd="sng">
+                      <a:noFill/>
+                    </a:lnT>
+                    <a:lnB w="38100" cmpd="sng">
+                      <a:noFill/>
+                    </a:lnB>
+                    <a:lnTlToBr w="12700" cmpd="sng">
+                      <a:noFill/>
+                      <a:prstDash val="solid"/>
+                    </a:lnTlToBr>
+                    <a:lnBlToTr w="12700" cmpd="sng">
+                      <a:noFill/>
+                      <a:prstDash val="solid"/>
+                    </a:lnBlToTr>
+                    <a:noFill/>
+                  </a:tcPr>
+                </a:tc>
+                <a:tc>
+                  <a:txBody>
+                    <a:bodyPr/>
+                    <a:lstStyle/>
+                    <a:p>
+                      <a:pPr algn="ctr"/>
+                      <a:r>
+                        <a:rPr lang="en-US" sz="1000" b="0" dirty="0">
+                          <a:solidFill>
+                            <a:schemeClr val="tx1"/>
+                          </a:solidFill>
+                        </a:rPr>
+                        <a:t>&lt;0.01</a:t>
+                      </a:r>
+                    </a:p>
+                  </a:txBody>
+                  <a:tcPr marL="9144" marR="9144" marT="9144" marB="9144">
+                    <a:lnL w="12700" cmpd="sng">
+                      <a:noFill/>
+                    </a:lnL>
+                    <a:lnR w="12700" cmpd="sng">
+                      <a:noFill/>
+                    </a:lnR>
+                    <a:lnT w="12700" cmpd="sng">
+                      <a:noFill/>
+                    </a:lnT>
+                    <a:lnB w="38100" cmpd="sng">
+                      <a:noFill/>
+                    </a:lnB>
+                    <a:lnTlToBr w="12700" cmpd="sng">
+                      <a:noFill/>
+                      <a:prstDash val="solid"/>
+                    </a:lnTlToBr>
+                    <a:lnBlToTr w="12700" cmpd="sng">
+                      <a:noFill/>
+                      <a:prstDash val="solid"/>
+                    </a:lnBlToTr>
+                    <a:noFill/>
+                  </a:tcPr>
+                </a:tc>
+                <a:tc>
+                  <a:txBody>
+                    <a:bodyPr/>
+                    <a:lstStyle/>
+                    <a:p>
+                      <a:pPr algn="ctr"/>
+                      <a:r>
+                        <a:rPr lang="en-US" sz="1000" b="0" dirty="0">
+                          <a:solidFill>
+                            <a:schemeClr val="tx1"/>
+                          </a:solidFill>
+                        </a:rPr>
+                        <a:t>&lt;0.001</a:t>
+                      </a:r>
+                    </a:p>
+                  </a:txBody>
+                  <a:tcPr marL="9144" marR="9144" marT="9144" marB="9144">
+                    <a:lnL w="12700" cmpd="sng">
+                      <a:noFill/>
+                    </a:lnL>
+                    <a:lnR w="12700" cmpd="sng">
+                      <a:noFill/>
+                    </a:lnR>
+                    <a:lnT w="12700" cmpd="sng">
+                      <a:noFill/>
+                    </a:lnT>
+                    <a:lnB w="38100" cmpd="sng">
+                      <a:noFill/>
+                    </a:lnB>
+                    <a:lnTlToBr w="12700" cmpd="sng">
+                      <a:noFill/>
+                      <a:prstDash val="solid"/>
+                    </a:lnTlToBr>
+                    <a:lnBlToTr w="12700" cmpd="sng">
+                      <a:noFill/>
+                      <a:prstDash val="solid"/>
+                    </a:lnBlToTr>
+                    <a:noFill/>
+                  </a:tcPr>
+                </a:tc>
+                <a:extLst>
+                  <a:ext uri="{0D108BD9-81ED-4DB2-BD59-A6C34878D82A}">
+                    <a16:rowId xmlns:a16="http://schemas.microsoft.com/office/drawing/2014/main" val="3000085719"/>
+                  </a:ext>
+                </a:extLst>
+              </a:tr>
+              <a:tr h="171173">
+                <a:tc>
+                  <a:txBody>
+                    <a:bodyPr/>
+                    <a:lstStyle/>
+                    <a:p>
+                      <a:pPr algn="ctr"/>
+                      <a:r>
+                        <a:rPr lang="en-US" sz="1000" b="0" dirty="0">
+                          <a:solidFill>
+                            <a:schemeClr val="tx1"/>
+                          </a:solidFill>
+                        </a:rPr>
+                        <a:t>uncorrected</a:t>
+                      </a:r>
+                    </a:p>
+                  </a:txBody>
+                  <a:tcPr marL="9144" marR="9144" marT="9144" marB="9144">
+                    <a:lnL w="12700" cmpd="sng">
+                      <a:noFill/>
+                    </a:lnL>
+                    <a:lnR w="12700" cmpd="sng">
+                      <a:noFill/>
+                    </a:lnR>
+                    <a:lnT w="38100" cmpd="sng">
+                      <a:noFill/>
+                    </a:lnT>
+                    <a:lnB w="12700" cmpd="sng">
+                      <a:noFill/>
+                    </a:lnB>
+                    <a:lnTlToBr w="12700" cmpd="sng">
+                      <a:noFill/>
+                      <a:prstDash val="solid"/>
+                    </a:lnTlToBr>
+                    <a:lnBlToTr w="12700" cmpd="sng">
+                      <a:noFill/>
+                      <a:prstDash val="solid"/>
+                    </a:lnBlToTr>
+                    <a:noFill/>
+                  </a:tcPr>
+                </a:tc>
+                <a:tc>
+                  <a:txBody>
+                    <a:bodyPr/>
+                    <a:lstStyle/>
+                    <a:p>
+                      <a:pPr marL="0" marR="0" lvl="0" indent="0" algn="ctr" defTabSz="1051560" rtl="0" eaLnBrk="1" fontAlgn="auto" latinLnBrk="0" hangingPunct="1">
+                        <a:lnSpc>
+                          <a:spcPct val="100000"/>
+                        </a:lnSpc>
+                        <a:spcBef>
+                          <a:spcPts val="0"/>
+                        </a:spcBef>
+                        <a:spcAft>
+                          <a:spcPts val="0"/>
+                        </a:spcAft>
+                        <a:buClrTx/>
+                        <a:buSzTx/>
+                        <a:buFontTx/>
+                        <a:buNone/>
+                        <a:tabLst/>
+                        <a:defRPr/>
+                      </a:pPr>
+                      <a:r>
+                        <a:rPr lang="en-US" sz="1000" b="0" dirty="0">
+                          <a:solidFill>
+                            <a:schemeClr val="tx1"/>
+                          </a:solidFill>
+                          <a:latin typeface="Abadi" panose="020B0604020104020204" pitchFamily="34" charset="77"/>
+                        </a:rPr>
+                        <a:t>†</a:t>
+                      </a:r>
+                    </a:p>
+                  </a:txBody>
+                  <a:tcPr marL="9144" marR="9144" marT="9144" marB="9144">
+                    <a:lnL w="12700" cmpd="sng">
+                      <a:noFill/>
+                    </a:lnL>
+                    <a:lnR w="12700" cmpd="sng">
+                      <a:noFill/>
+                    </a:lnR>
+                    <a:lnT w="38100" cmpd="sng">
+                      <a:noFill/>
+                    </a:lnT>
+                    <a:lnB w="12700" cmpd="sng">
+                      <a:noFill/>
+                    </a:lnB>
+                    <a:lnTlToBr w="12700" cmpd="sng">
+                      <a:noFill/>
+                      <a:prstDash val="solid"/>
+                    </a:lnTlToBr>
+                    <a:lnBlToTr w="12700" cmpd="sng">
+                      <a:noFill/>
+                      <a:prstDash val="solid"/>
+                    </a:lnBlToTr>
+                    <a:noFill/>
+                  </a:tcPr>
+                </a:tc>
+                <a:tc>
+                  <a:txBody>
+                    <a:bodyPr/>
+                    <a:lstStyle/>
+                    <a:p>
+                      <a:pPr marL="0" marR="0" lvl="0" indent="0" algn="ctr" defTabSz="1051560" rtl="0" eaLnBrk="1" fontAlgn="auto" latinLnBrk="0" hangingPunct="1">
+                        <a:lnSpc>
+                          <a:spcPct val="100000"/>
+                        </a:lnSpc>
+                        <a:spcBef>
+                          <a:spcPts val="0"/>
+                        </a:spcBef>
+                        <a:spcAft>
+                          <a:spcPts val="0"/>
+                        </a:spcAft>
+                        <a:buClrTx/>
+                        <a:buSzTx/>
+                        <a:buFontTx/>
+                        <a:buNone/>
+                        <a:tabLst/>
+                        <a:defRPr/>
+                      </a:pPr>
+                      <a:r>
+                        <a:rPr lang="en-US" sz="1000" b="0" dirty="0">
+                          <a:solidFill>
+                            <a:schemeClr val="tx1"/>
+                          </a:solidFill>
+                          <a:latin typeface="Abadi" panose="020B0604020104020204" pitchFamily="34" charset="77"/>
+                        </a:rPr>
+                        <a:t>††</a:t>
+                      </a:r>
+                    </a:p>
+                  </a:txBody>
+                  <a:tcPr marL="9144" marR="9144" marT="9144" marB="9144">
+                    <a:lnL w="12700" cmpd="sng">
+                      <a:noFill/>
+                    </a:lnL>
+                    <a:lnR w="12700" cmpd="sng">
+                      <a:noFill/>
+                    </a:lnR>
+                    <a:lnT w="38100" cmpd="sng">
+                      <a:noFill/>
+                    </a:lnT>
+                    <a:lnB w="12700" cmpd="sng">
+                      <a:noFill/>
+                    </a:lnB>
+                    <a:lnTlToBr w="12700" cmpd="sng">
+                      <a:noFill/>
+                      <a:prstDash val="solid"/>
+                    </a:lnTlToBr>
+                    <a:lnBlToTr w="12700" cmpd="sng">
+                      <a:noFill/>
+                      <a:prstDash val="solid"/>
+                    </a:lnBlToTr>
+                    <a:noFill/>
+                  </a:tcPr>
+                </a:tc>
+                <a:tc>
+                  <a:txBody>
+                    <a:bodyPr/>
+                    <a:lstStyle/>
+                    <a:p>
+                      <a:pPr marL="0" marR="0" lvl="0" indent="0" algn="ctr" defTabSz="1051560" rtl="0" eaLnBrk="1" fontAlgn="auto" latinLnBrk="0" hangingPunct="1">
+                        <a:lnSpc>
+                          <a:spcPct val="100000"/>
+                        </a:lnSpc>
+                        <a:spcBef>
+                          <a:spcPts val="0"/>
+                        </a:spcBef>
+                        <a:spcAft>
+                          <a:spcPts val="0"/>
+                        </a:spcAft>
+                        <a:buClrTx/>
+                        <a:buSzTx/>
+                        <a:buFontTx/>
+                        <a:buNone/>
+                        <a:tabLst/>
+                        <a:defRPr/>
+                      </a:pPr>
+                      <a:r>
+                        <a:rPr lang="en-US" sz="1000" b="0" dirty="0">
+                          <a:solidFill>
+                            <a:schemeClr val="tx1"/>
+                          </a:solidFill>
+                          <a:latin typeface="Abadi" panose="020B0604020104020204" pitchFamily="34" charset="77"/>
+                        </a:rPr>
+                        <a:t>†††</a:t>
+                      </a:r>
+                    </a:p>
+                  </a:txBody>
+                  <a:tcPr marL="9144" marR="9144" marT="9144" marB="9144">
+                    <a:lnL w="12700" cmpd="sng">
+                      <a:noFill/>
+                    </a:lnL>
+                    <a:lnR w="12700" cmpd="sng">
+                      <a:noFill/>
+                    </a:lnR>
+                    <a:lnT w="38100" cmpd="sng">
+                      <a:noFill/>
+                    </a:lnT>
+                    <a:lnB w="12700" cmpd="sng">
+                      <a:noFill/>
+                    </a:lnB>
+                    <a:lnTlToBr w="12700" cmpd="sng">
+                      <a:noFill/>
+                      <a:prstDash val="solid"/>
+                    </a:lnTlToBr>
+                    <a:lnBlToTr w="12700" cmpd="sng">
+                      <a:noFill/>
+                      <a:prstDash val="solid"/>
+                    </a:lnBlToTr>
+                    <a:noFill/>
+                  </a:tcPr>
+                </a:tc>
+                <a:extLst>
+                  <a:ext uri="{0D108BD9-81ED-4DB2-BD59-A6C34878D82A}">
+                    <a16:rowId xmlns:a16="http://schemas.microsoft.com/office/drawing/2014/main" val="1483723138"/>
+                  </a:ext>
+                </a:extLst>
+              </a:tr>
+              <a:tr h="260326">
+                <a:tc>
+                  <a:txBody>
+                    <a:bodyPr/>
+                    <a:lstStyle/>
+                    <a:p>
+                      <a:pPr algn="ctr"/>
+                      <a:r>
+                        <a:rPr lang="en-US" sz="1000" b="0" dirty="0">
+                          <a:solidFill>
+                            <a:schemeClr val="tx1"/>
+                          </a:solidFill>
+                        </a:rPr>
+                        <a:t>corrected</a:t>
+                      </a:r>
+                    </a:p>
+                  </a:txBody>
+                  <a:tcPr marL="9144" marR="9144" marT="9144" marB="9144">
+                    <a:lnL w="12700" cmpd="sng">
+                      <a:noFill/>
+                    </a:lnL>
+                    <a:lnR w="12700" cmpd="sng">
+                      <a:noFill/>
+                    </a:lnR>
+                    <a:lnT w="12700" cmpd="sng">
+                      <a:noFill/>
+                    </a:lnT>
+                    <a:lnB w="12700" cmpd="sng">
+                      <a:noFill/>
+                    </a:lnB>
+                    <a:lnTlToBr w="12700" cmpd="sng">
+                      <a:noFill/>
+                      <a:prstDash val="solid"/>
+                    </a:lnTlToBr>
+                    <a:lnBlToTr w="12700" cmpd="sng">
+                      <a:noFill/>
+                      <a:prstDash val="solid"/>
+                    </a:lnBlToTr>
+                    <a:noFill/>
+                  </a:tcPr>
+                </a:tc>
+                <a:tc>
+                  <a:txBody>
+                    <a:bodyPr/>
+                    <a:lstStyle/>
+                    <a:p>
+                      <a:pPr algn="ctr"/>
+                      <a:r>
+                        <a:rPr lang="en-US" sz="1000" b="0" dirty="0">
+                          <a:solidFill>
+                            <a:schemeClr val="tx1"/>
+                          </a:solidFill>
+                        </a:rPr>
+                        <a:t>*</a:t>
+                      </a:r>
+                    </a:p>
+                  </a:txBody>
+                  <a:tcPr marL="9144" marR="9144" marT="9144" marB="9144">
+                    <a:lnL w="12700" cmpd="sng">
+                      <a:noFill/>
+                    </a:lnL>
+                    <a:lnR w="12700" cmpd="sng">
+                      <a:noFill/>
+                    </a:lnR>
+                    <a:lnT w="12700" cmpd="sng">
+                      <a:noFill/>
+                    </a:lnT>
+                    <a:lnB w="12700" cmpd="sng">
+                      <a:noFill/>
+                    </a:lnB>
+                    <a:lnTlToBr w="12700" cmpd="sng">
+                      <a:noFill/>
+                      <a:prstDash val="solid"/>
+                    </a:lnTlToBr>
+                    <a:lnBlToTr w="12700" cmpd="sng">
+                      <a:noFill/>
+                      <a:prstDash val="solid"/>
+                    </a:lnBlToTr>
+                    <a:noFill/>
+                  </a:tcPr>
+                </a:tc>
+                <a:tc>
+                  <a:txBody>
+                    <a:bodyPr/>
+                    <a:lstStyle/>
+                    <a:p>
+                      <a:pPr algn="ctr"/>
+                      <a:r>
+                        <a:rPr lang="en-US" sz="1000" b="0" dirty="0">
+                          <a:solidFill>
+                            <a:schemeClr val="tx1"/>
+                          </a:solidFill>
+                        </a:rPr>
+                        <a:t>**</a:t>
+                      </a:r>
+                    </a:p>
+                  </a:txBody>
+                  <a:tcPr marL="9144" marR="9144" marT="9144" marB="9144">
+                    <a:lnL w="12700" cmpd="sng">
+                      <a:noFill/>
+                    </a:lnL>
+                    <a:lnR w="12700" cmpd="sng">
+                      <a:noFill/>
+                    </a:lnR>
+                    <a:lnT w="12700" cmpd="sng">
+                      <a:noFill/>
+                    </a:lnT>
+                    <a:lnB w="12700" cmpd="sng">
+                      <a:noFill/>
+                    </a:lnB>
+                    <a:lnTlToBr w="12700" cmpd="sng">
+                      <a:noFill/>
+                      <a:prstDash val="solid"/>
+                    </a:lnTlToBr>
+                    <a:lnBlToTr w="12700" cmpd="sng">
+                      <a:noFill/>
+                      <a:prstDash val="solid"/>
+                    </a:lnBlToTr>
+                    <a:noFill/>
+                  </a:tcPr>
+                </a:tc>
+                <a:tc>
+                  <a:txBody>
+                    <a:bodyPr/>
+                    <a:lstStyle/>
+                    <a:p>
+                      <a:pPr algn="ctr"/>
+                      <a:r>
+                        <a:rPr lang="en-US" sz="1000" b="0" dirty="0">
+                          <a:solidFill>
+                            <a:schemeClr val="tx1"/>
+                          </a:solidFill>
+                        </a:rPr>
+                        <a:t>***</a:t>
+                      </a:r>
+                    </a:p>
+                  </a:txBody>
+                  <a:tcPr marL="9144" marR="9144" marT="9144" marB="9144">
+                    <a:lnL w="12700" cmpd="sng">
+                      <a:noFill/>
+                    </a:lnL>
+                    <a:lnR w="12700" cmpd="sng">
+                      <a:noFill/>
+                    </a:lnR>
+                    <a:lnT w="12700" cmpd="sng">
+                      <a:noFill/>
+                    </a:lnT>
+                    <a:lnB w="12700" cmpd="sng">
+                      <a:noFill/>
+                    </a:lnB>
+                    <a:lnTlToBr w="12700" cmpd="sng">
+                      <a:noFill/>
+                      <a:prstDash val="solid"/>
+                    </a:lnTlToBr>
+                    <a:lnBlToTr w="12700" cmpd="sng">
+                      <a:noFill/>
+                      <a:prstDash val="solid"/>
+                    </a:lnBlToTr>
+                    <a:noFill/>
+                  </a:tcPr>
+                </a:tc>
+                <a:extLst>
+                  <a:ext uri="{0D108BD9-81ED-4DB2-BD59-A6C34878D82A}">
+                    <a16:rowId xmlns:a16="http://schemas.microsoft.com/office/drawing/2014/main" val="3721085771"/>
+                  </a:ext>
+                </a:extLst>
+              </a:tr>
+            </a:tbl>
+          </a:graphicData>
+        </a:graphic>
+      </p:graphicFrame>
     </p:spTree>
     <p:extLst>
       <p:ext uri="{BB962C8B-B14F-4D97-AF65-F5344CB8AC3E}">
